--- a/dist/초1/수학/수와연산/초1_수학_수와연산_02_수의순서와크기비교.pptx
+++ b/dist/초1/수학/수와연산/초1_수학_수와연산_02_수의순서와크기비교.pptx
@@ -120,13 +120,13 @@
   <p:extLst>
     <p:ext uri="{521415D9-36F7-43E2-AB2F-B90AF26B5E84}">
       <p14:sectionLst xmlns:p14="http://schemas.microsoft.com/office/powerpoint/2010/main">
-        <p14:section name="도입" id="{f568a303-5a44-8e66-7a2b-62cbbeef882c}">
+        <p14:section name="도입" id="{4cef6669-9a41-c37e-bd16-410a25bfb36e}">
           <p14:sldIdLst>
             <p14:sldId id="256"/>
             <p14:sldId id="257"/>
           </p14:sldIdLst>
         </p14:section>
-        <p14:section name="개념" id="{c7682518-1221-2cca-4346-15827a464cef}">
+        <p14:section name="개념" id="{7f50d5fe-ef8b-0522-d7fa-675d346ab75e}">
           <p14:sldIdLst>
             <p14:sldId id="258"/>
             <p14:sldId id="259"/>
@@ -134,26 +134,26 @@
             <p14:sldId id="261"/>
           </p14:sldIdLst>
         </p14:section>
-        <p14:section name="연습" id="{254d9bbd-6b99-d573-5fd3-d6ae8dd4d49b}">
+        <p14:section name="연습" id="{f8cc9475-f1ff-0f63-7dec-cba95de340f7}">
           <p14:sldIdLst>
             <p14:sldId id="262"/>
             <p14:sldId id="263"/>
             <p14:sldId id="264"/>
           </p14:sldIdLst>
         </p14:section>
-        <p14:section name="확인" id="{59a592d2-6b8a-df29-d429-38ae610ac97a}">
+        <p14:section name="확인" id="{429df250-6e18-a788-4888-3d8a40e23e1a}">
           <p14:sldIdLst>
             <p14:sldId id="265"/>
             <p14:sldId id="266"/>
             <p14:sldId id="267"/>
           </p14:sldIdLst>
         </p14:section>
-        <p14:section name="정리" id="{c240262e-5160-2f04-f95a-83f2f92cfd0e}">
+        <p14:section name="정리" id="{1298aa14-0344-3fde-917f-b5f21145ec6c}">
           <p14:sldIdLst>
             <p14:sldId id="268"/>
           </p14:sldIdLst>
         </p14:section>
-        <p14:section name="보충" id="{2c8f7d63-5bd1-4c54-62ec-718286163f49}">
+        <p14:section name="보충" id="{e32ab7ab-a8bd-ee5d-92ed-51c06cf90d8e}">
           <p14:sldIdLst>
             <p14:sldId id="269"/>
           </p14:sldIdLst>
@@ -2961,7 +2961,7 @@
           <a:bodyPr wrap="square" lIns="0" tIns="0" rIns="0" bIns="0" rtlCol="0" anchor="ctr"/>
           <a:lstStyle/>
           <a:p>
-            <a:pPr algn="l" indent="0" marL="0">
+            <a:pPr eaLnBrk="0" algn="l" indent="0" marL="0">
               <a:buNone/>
             </a:pPr>
             <a:r>
@@ -3002,7 +3002,7 @@
           <a:bodyPr wrap="square" lIns="0" tIns="0" rIns="0" bIns="0" rtlCol="0" anchor="t"/>
           <a:lstStyle/>
           <a:p>
-            <a:pPr indent="0" marL="0">
+            <a:pPr eaLnBrk="0" indent="0" marL="0">
               <a:buNone/>
             </a:pPr>
             <a:r>
@@ -3347,7 +3347,7 @@
       </p:sp>
       <p:sp>
         <p:nvSpPr>
-          <p:cNvPr id="17" name="S01-figure14" descr="십 칸 틀에 3개"/>
+          <p:cNvPr id="17" name="S01-figure14" descr="1개의 십 칸 틀 중 1번째: 모두 3개"/>
           <p:cNvSpPr/>
           <p:nvPr/>
         </p:nvSpPr>
@@ -3749,7 +3749,7 @@
       </p:sp>
       <p:sp>
         <p:nvSpPr>
-          <p:cNvPr id="33" name="S01-figure30" descr="십 칸 틀에 5개"/>
+          <p:cNvPr id="33" name="S01-figure30" descr="1개의 십 칸 틀 중 1번째: 모두 5개"/>
           <p:cNvSpPr/>
           <p:nvPr/>
         </p:nvSpPr>
@@ -3822,7 +3822,7 @@
           <a:bodyPr wrap="square" lIns="0" tIns="0" rIns="0" bIns="0" rtlCol="0" anchor="ctr"/>
           <a:lstStyle/>
           <a:p>
-            <a:pPr indent="0" marL="0">
+            <a:pPr eaLnBrk="0" indent="0" marL="0">
               <a:spcAft>
                 <a:spcPts val="600"/>
               </a:spcAft>
@@ -3842,7 +3842,7 @@
             <a:endParaRPr lang="ko-KR" sz="3200" dirty="0"/>
           </a:p>
           <a:p>
-            <a:pPr indent="0" marL="0">
+            <a:pPr eaLnBrk="0" indent="0" marL="0">
               <a:spcAft>
                 <a:spcPts val="600"/>
               </a:spcAft>
@@ -3862,7 +3862,7 @@
             <a:endParaRPr lang="ko-KR" sz="3200" dirty="0"/>
           </a:p>
           <a:p>
-            <a:pPr indent="0" marL="0">
+            <a:pPr eaLnBrk="0" indent="0" marL="0">
               <a:spcAft>
                 <a:spcPts val="600"/>
               </a:spcAft>
@@ -3882,7 +3882,7 @@
             <a:endParaRPr lang="ko-KR" sz="3200" dirty="0"/>
           </a:p>
           <a:p>
-            <a:pPr indent="0" marL="0">
+            <a:pPr eaLnBrk="0" indent="0" marL="0">
               <a:spcAft>
                 <a:spcPts val="600"/>
               </a:spcAft>
@@ -3951,7 +3951,7 @@
           <a:bodyPr wrap="square" lIns="0" tIns="0" rIns="0" bIns="0" rtlCol="0" anchor="ctr"/>
           <a:lstStyle/>
           <a:p>
-            <a:pPr algn="l" indent="0" marL="0">
+            <a:pPr eaLnBrk="0" algn="l" indent="0" marL="0">
               <a:buNone/>
             </a:pPr>
             <a:r>
@@ -3990,7 +3990,7 @@
           <a:bodyPr wrap="square" lIns="0" tIns="0" rIns="0" bIns="0" rtlCol="0" anchor="ctr"/>
           <a:lstStyle/>
           <a:p>
-            <a:pPr algn="l" indent="0" marL="0">
+            <a:pPr eaLnBrk="0" algn="l" indent="0" marL="0">
               <a:buNone/>
             </a:pPr>
             <a:r>
@@ -4037,7 +4037,7 @@
           <a:bodyPr wrap="square" lIns="0" tIns="0" rIns="0" bIns="0" rtlCol="0" anchor="ctr"/>
           <a:lstStyle/>
           <a:p>
-            <a:pPr algn="ctr" indent="0" marL="0">
+            <a:pPr eaLnBrk="0" algn="ctr" indent="0" marL="0">
               <a:buNone/>
             </a:pPr>
             <a:r>
@@ -4076,7 +4076,7 @@
           <a:bodyPr wrap="square" lIns="0" tIns="0" rIns="0" bIns="0" rtlCol="0" anchor="ctr"/>
           <a:lstStyle/>
           <a:p>
-            <a:pPr algn="l" indent="0" marL="0">
+            <a:pPr eaLnBrk="0" algn="l" indent="0" marL="0">
               <a:buNone/>
             </a:pPr>
             <a:r>
@@ -4123,7 +4123,7 @@
           <a:bodyPr wrap="square" lIns="0" tIns="0" rIns="0" bIns="0" rtlCol="0" anchor="ctr"/>
           <a:lstStyle/>
           <a:p>
-            <a:pPr algn="ctr" indent="0" marL="0">
+            <a:pPr eaLnBrk="0" algn="ctr" indent="0" marL="0">
               <a:buNone/>
             </a:pPr>
             <a:r>
@@ -4162,7 +4162,7 @@
           <a:bodyPr wrap="square" lIns="0" tIns="0" rIns="0" bIns="0" rtlCol="0" anchor="ctr"/>
           <a:lstStyle/>
           <a:p>
-            <a:pPr algn="l" indent="0" marL="0">
+            <a:pPr eaLnBrk="0" algn="l" indent="0" marL="0">
               <a:buNone/>
             </a:pPr>
             <a:r>
@@ -4209,7 +4209,7 @@
           <a:bodyPr wrap="square" lIns="0" tIns="0" rIns="0" bIns="0" rtlCol="0" anchor="ctr"/>
           <a:lstStyle/>
           <a:p>
-            <a:pPr algn="ctr" indent="0" marL="0">
+            <a:pPr eaLnBrk="0" algn="ctr" indent="0" marL="0">
               <a:buNone/>
             </a:pPr>
             <a:r>
@@ -4248,7 +4248,7 @@
           <a:bodyPr wrap="square" lIns="0" tIns="0" rIns="0" bIns="0" rtlCol="0" anchor="ctr"/>
           <a:lstStyle/>
           <a:p>
-            <a:pPr algn="l" indent="0" marL="0">
+            <a:pPr eaLnBrk="0" algn="l" indent="0" marL="0">
               <a:buNone/>
             </a:pPr>
             <a:r>
@@ -4305,7 +4305,7 @@
             </a:lvl1pPr>
           </a:lstStyle>
           <a:p>
-            <a:pPr algn="r"/>
+            <a:pPr eaLnBrk="0" algn="r"/>
             <a:fld id="{F7021451-1387-4CA6-816F-3879F97B5CBC}" type="slidenum">
               <a:rPr b="0" lang="en-US"/>
               <a:t>10</a:t>
@@ -4362,7 +4362,7 @@
           <a:bodyPr wrap="square" lIns="0" tIns="0" rIns="0" bIns="0" rtlCol="0" anchor="ctr"/>
           <a:lstStyle/>
           <a:p>
-            <a:pPr algn="l" indent="0" marL="0">
+            <a:pPr eaLnBrk="0" algn="l" indent="0" marL="0">
               <a:buNone/>
             </a:pPr>
             <a:r>
@@ -4428,7 +4428,7 @@
           <a:bodyPr wrap="square" lIns="0" tIns="0" rIns="0" bIns="0" rtlCol="0" anchor="ctr"/>
           <a:lstStyle/>
           <a:p>
-            <a:pPr indent="0" marL="0">
+            <a:pPr eaLnBrk="0" indent="0" marL="0">
               <a:spcAft>
                 <a:spcPts val="600"/>
               </a:spcAft>
@@ -4478,7 +4478,7 @@
           <a:bodyPr wrap="square" lIns="177800" tIns="0" rIns="177800" bIns="0" rtlCol="0" anchor="ctr"/>
           <a:lstStyle/>
           <a:p>
-            <a:pPr algn="l" indent="0" marL="0">
+            <a:pPr eaLnBrk="0" algn="l" indent="0" marL="0">
               <a:buNone/>
             </a:pPr>
             <a:r>
@@ -4517,7 +4517,7 @@
           <a:bodyPr wrap="square" lIns="0" tIns="0" rIns="0" bIns="0" rtlCol="0" anchor="ctr"/>
           <a:lstStyle/>
           <a:p>
-            <a:pPr algn="l" indent="0" marL="0">
+            <a:pPr eaLnBrk="0" algn="l" indent="0" marL="0">
               <a:buNone/>
             </a:pPr>
             <a:r>
@@ -4556,7 +4556,7 @@
           <a:bodyPr wrap="square" lIns="0" tIns="0" rIns="0" bIns="0" rtlCol="0" anchor="ctr"/>
           <a:lstStyle/>
           <a:p>
-            <a:pPr algn="l" indent="0" marL="0">
+            <a:pPr eaLnBrk="0" algn="l" indent="0" marL="0">
               <a:buNone/>
             </a:pPr>
             <a:r>
@@ -4595,7 +4595,7 @@
           <a:bodyPr wrap="square" lIns="0" tIns="0" rIns="0" bIns="0" rtlCol="0" anchor="ctr"/>
           <a:lstStyle/>
           <a:p>
-            <a:pPr algn="l" indent="0" marL="0">
+            <a:pPr eaLnBrk="0" algn="l" indent="0" marL="0">
               <a:buNone/>
             </a:pPr>
             <a:r>
@@ -4634,7 +4634,7 @@
           <a:bodyPr wrap="square" lIns="0" tIns="0" rIns="0" bIns="0" rtlCol="0" anchor="ctr"/>
           <a:lstStyle/>
           <a:p>
-            <a:pPr algn="l" indent="0" marL="0">
+            <a:pPr eaLnBrk="0" algn="l" indent="0" marL="0">
               <a:buNone/>
             </a:pPr>
             <a:r>
@@ -4673,7 +4673,7 @@
           <a:bodyPr wrap="square" lIns="0" tIns="0" rIns="0" bIns="0" rtlCol="0" anchor="ctr"/>
           <a:lstStyle/>
           <a:p>
-            <a:pPr algn="l" indent="0" marL="0">
+            <a:pPr eaLnBrk="0" algn="l" indent="0" marL="0">
               <a:buNone/>
             </a:pPr>
             <a:r>
@@ -4712,7 +4712,7 @@
           <a:bodyPr wrap="square" lIns="0" tIns="0" rIns="0" bIns="0" rtlCol="0" anchor="ctr"/>
           <a:lstStyle/>
           <a:p>
-            <a:pPr algn="l" indent="0" marL="0">
+            <a:pPr eaLnBrk="0" algn="l" indent="0" marL="0">
               <a:buNone/>
             </a:pPr>
             <a:r>
@@ -4759,7 +4759,7 @@
           <a:bodyPr wrap="square" lIns="177800" tIns="0" rIns="177800" bIns="0" rtlCol="0" anchor="ctr"/>
           <a:lstStyle/>
           <a:p>
-            <a:pPr algn="l" indent="0" marL="0">
+            <a:pPr eaLnBrk="0" algn="l" indent="0" marL="0">
               <a:buNone/>
             </a:pPr>
             <a:r>
@@ -4798,7 +4798,7 @@
           <a:bodyPr wrap="square" lIns="0" tIns="0" rIns="0" bIns="0" rtlCol="0" anchor="ctr"/>
           <a:lstStyle/>
           <a:p>
-            <a:pPr algn="l" indent="0" marL="0">
+            <a:pPr eaLnBrk="0" algn="l" indent="0" marL="0">
               <a:buNone/>
             </a:pPr>
             <a:r>
@@ -4837,7 +4837,7 @@
           <a:bodyPr wrap="square" lIns="0" tIns="0" rIns="0" bIns="0" rtlCol="0" anchor="ctr"/>
           <a:lstStyle/>
           <a:p>
-            <a:pPr algn="l" indent="0" marL="0">
+            <a:pPr eaLnBrk="0" algn="l" indent="0" marL="0">
               <a:buNone/>
             </a:pPr>
             <a:r>
@@ -4876,7 +4876,7 @@
           <a:bodyPr wrap="square" lIns="0" tIns="0" rIns="0" bIns="0" rtlCol="0" anchor="ctr"/>
           <a:lstStyle/>
           <a:p>
-            <a:pPr algn="l" indent="0" marL="0">
+            <a:pPr eaLnBrk="0" algn="l" indent="0" marL="0">
               <a:buNone/>
             </a:pPr>
             <a:r>
@@ -4915,7 +4915,7 @@
           <a:bodyPr wrap="square" lIns="0" tIns="0" rIns="0" bIns="0" rtlCol="0" anchor="ctr"/>
           <a:lstStyle/>
           <a:p>
-            <a:pPr algn="l" indent="0" marL="0">
+            <a:pPr eaLnBrk="0" algn="l" indent="0" marL="0">
               <a:buNone/>
             </a:pPr>
             <a:r>
@@ -4954,7 +4954,7 @@
           <a:bodyPr wrap="square" lIns="0" tIns="0" rIns="0" bIns="0" rtlCol="0" anchor="ctr"/>
           <a:lstStyle/>
           <a:p>
-            <a:pPr algn="l" indent="0" marL="0">
+            <a:pPr eaLnBrk="0" algn="l" indent="0" marL="0">
               <a:buNone/>
             </a:pPr>
             <a:r>
@@ -4993,7 +4993,7 @@
           <a:bodyPr wrap="square" lIns="0" tIns="0" rIns="0" bIns="0" rtlCol="0" anchor="ctr"/>
           <a:lstStyle/>
           <a:p>
-            <a:pPr algn="l" indent="0" marL="0">
+            <a:pPr eaLnBrk="0" algn="l" indent="0" marL="0">
               <a:buNone/>
             </a:pPr>
             <a:r>
@@ -5050,7 +5050,7 @@
             </a:lvl1pPr>
           </a:lstStyle>
           <a:p>
-            <a:pPr algn="r"/>
+            <a:pPr eaLnBrk="0" algn="r"/>
             <a:fld id="{F7021451-1387-4CA6-816F-3879F97B5CBC}" type="slidenum">
               <a:rPr b="0" lang="en-US"/>
               <a:t>11</a:t>
@@ -5107,7 +5107,7 @@
           <a:bodyPr wrap="square" lIns="0" tIns="0" rIns="0" bIns="0" rtlCol="0" anchor="ctr"/>
           <a:lstStyle/>
           <a:p>
-            <a:pPr algn="l" indent="0" marL="0">
+            <a:pPr eaLnBrk="0" algn="l" indent="0" marL="0">
               <a:buNone/>
             </a:pPr>
             <a:r>
@@ -5173,7 +5173,7 @@
           <a:bodyPr wrap="square" lIns="0" tIns="0" rIns="0" bIns="0" rtlCol="0" anchor="ctr"/>
           <a:lstStyle/>
           <a:p>
-            <a:pPr indent="0" marL="0">
+            <a:pPr eaLnBrk="0" indent="0" marL="0">
               <a:spcAft>
                 <a:spcPts val="600"/>
               </a:spcAft>
@@ -5223,7 +5223,7 @@
           <a:bodyPr wrap="square" lIns="0" tIns="0" rIns="0" bIns="0" rtlCol="0" anchor="ctr"/>
           <a:lstStyle/>
           <a:p>
-            <a:pPr algn="ctr" indent="0" marL="0">
+            <a:pPr eaLnBrk="0" algn="ctr" indent="0" marL="0">
               <a:buNone/>
             </a:pPr>
             <a:r>
@@ -5693,7 +5693,7 @@
       </p:sp>
       <p:sp>
         <p:nvSpPr>
-          <p:cNvPr id="24" name="S12-figure307" descr="십 칸 틀에 8개"/>
+          <p:cNvPr id="24" name="S12-figure307" descr="1개의 십 칸 틀 중 1번째: 모두 8개"/>
           <p:cNvSpPr/>
           <p:nvPr/>
         </p:nvSpPr>
@@ -5747,7 +5747,7 @@
           <a:bodyPr wrap="square" lIns="0" tIns="0" rIns="0" bIns="0" rtlCol="0" anchor="ctr"/>
           <a:lstStyle/>
           <a:p>
-            <a:pPr algn="ctr" indent="0" marL="0">
+            <a:pPr eaLnBrk="0" algn="ctr" indent="0" marL="0">
               <a:buNone/>
             </a:pPr>
             <a:r>
@@ -6167,7 +6167,7 @@
       </p:sp>
       <p:sp>
         <p:nvSpPr>
-          <p:cNvPr id="42" name="S12-figure325" descr="십 칸 틀에 6개"/>
+          <p:cNvPr id="42" name="S12-figure325" descr="1개의 십 칸 틀 중 1번째: 모두 6개"/>
           <p:cNvSpPr/>
           <p:nvPr/>
         </p:nvSpPr>
@@ -6221,7 +6221,7 @@
           <a:bodyPr wrap="square" lIns="0" tIns="0" rIns="0" bIns="0" rtlCol="0" anchor="ctr"/>
           <a:lstStyle/>
           <a:p>
-            <a:pPr algn="ctr" indent="0" marL="0">
+            <a:pPr eaLnBrk="0" algn="ctr" indent="0" marL="0">
               <a:buNone/>
             </a:pPr>
             <a:r>
@@ -6666,7 +6666,7 @@
       </p:sp>
       <p:sp>
         <p:nvSpPr>
-          <p:cNvPr id="61" name="S12-figure344" descr="십 칸 틀에 7개"/>
+          <p:cNvPr id="61" name="S12-figure344" descr="1개의 십 칸 틀 중 1번째: 모두 7개"/>
           <p:cNvSpPr/>
           <p:nvPr/>
         </p:nvSpPr>
@@ -6730,7 +6730,7 @@
             </a:lvl1pPr>
           </a:lstStyle>
           <a:p>
-            <a:pPr algn="r"/>
+            <a:pPr eaLnBrk="0" algn="r"/>
             <a:fld id="{F7021451-1387-4CA6-816F-3879F97B5CBC}" type="slidenum">
               <a:rPr b="0" lang="en-US"/>
               <a:t>12</a:t>
@@ -6787,7 +6787,7 @@
           <a:bodyPr wrap="square" lIns="0" tIns="0" rIns="0" bIns="0" rtlCol="0" anchor="ctr"/>
           <a:lstStyle/>
           <a:p>
-            <a:pPr algn="l" indent="0" marL="0">
+            <a:pPr eaLnBrk="0" algn="l" indent="0" marL="0">
               <a:buNone/>
             </a:pPr>
             <a:r>
@@ -6853,7 +6853,7 @@
           <a:bodyPr wrap="square" lIns="0" tIns="0" rIns="0" bIns="0" rtlCol="0" anchor="ctr"/>
           <a:lstStyle/>
           <a:p>
-            <a:pPr indent="0" marL="0">
+            <a:pPr eaLnBrk="0" indent="0" marL="0">
               <a:spcAft>
                 <a:spcPts val="600"/>
               </a:spcAft>
@@ -6903,7 +6903,7 @@
           <a:bodyPr wrap="square" lIns="177800" tIns="0" rIns="177800" bIns="0" rtlCol="0" anchor="ctr"/>
           <a:lstStyle/>
           <a:p>
-            <a:pPr algn="l" indent="0" marL="0">
+            <a:pPr eaLnBrk="0" algn="l" indent="0" marL="0">
               <a:buNone/>
             </a:pPr>
             <a:r>
@@ -6950,7 +6950,7 @@
           <a:bodyPr wrap="square" lIns="177800" tIns="0" rIns="177800" bIns="0" rtlCol="0" anchor="ctr"/>
           <a:lstStyle/>
           <a:p>
-            <a:pPr algn="l" indent="0" marL="0">
+            <a:pPr eaLnBrk="0" algn="l" indent="0" marL="0">
               <a:buNone/>
             </a:pPr>
             <a:r>
@@ -6989,7 +6989,7 @@
           <a:bodyPr wrap="square" lIns="0" tIns="0" rIns="0" bIns="0" rtlCol="0" anchor="t"/>
           <a:lstStyle/>
           <a:p>
-            <a:pPr algn="l" indent="0" marL="0">
+            <a:pPr eaLnBrk="0" algn="l" indent="0" marL="0">
               <a:buNone/>
             </a:pPr>
             <a:r>
@@ -7028,7 +7028,7 @@
           <a:bodyPr wrap="square" lIns="0" tIns="0" rIns="0" bIns="0" rtlCol="0" anchor="ctr"/>
           <a:lstStyle/>
           <a:p>
-            <a:pPr algn="l" indent="0" marL="0">
+            <a:pPr eaLnBrk="0" algn="l" indent="0" marL="0">
               <a:buNone/>
             </a:pPr>
             <a:r>
@@ -7067,7 +7067,7 @@
           <a:bodyPr wrap="square" lIns="0" tIns="0" rIns="0" bIns="0" rtlCol="0" anchor="ctr"/>
           <a:lstStyle/>
           <a:p>
-            <a:pPr algn="l" indent="0" marL="0">
+            <a:pPr eaLnBrk="0" algn="l" indent="0" marL="0">
               <a:buNone/>
             </a:pPr>
             <a:r>
@@ -7106,7 +7106,7 @@
           <a:bodyPr wrap="square" lIns="0" tIns="0" rIns="0" bIns="0" rtlCol="0" anchor="ctr"/>
           <a:lstStyle/>
           <a:p>
-            <a:pPr algn="l" indent="0" marL="0">
+            <a:pPr eaLnBrk="0" algn="l" indent="0" marL="0">
               <a:buNone/>
             </a:pPr>
             <a:r>
@@ -7145,7 +7145,7 @@
           <a:bodyPr wrap="square" lIns="0" tIns="0" rIns="0" bIns="0" rtlCol="0" anchor="ctr"/>
           <a:lstStyle/>
           <a:p>
-            <a:pPr algn="l" indent="0" marL="0">
+            <a:pPr eaLnBrk="0" algn="l" indent="0" marL="0">
               <a:buNone/>
             </a:pPr>
             <a:r>
@@ -7202,7 +7202,7 @@
             </a:lvl1pPr>
           </a:lstStyle>
           <a:p>
-            <a:pPr algn="r"/>
+            <a:pPr eaLnBrk="0" algn="r"/>
             <a:fld id="{F7021451-1387-4CA6-816F-3879F97B5CBC}" type="slidenum">
               <a:rPr b="0" lang="en-US"/>
               <a:t>13</a:t>
@@ -7259,7 +7259,7 @@
           <a:bodyPr wrap="square" lIns="0" tIns="0" rIns="0" bIns="0" rtlCol="0" anchor="ctr"/>
           <a:lstStyle/>
           <a:p>
-            <a:pPr algn="l" indent="0" marL="0">
+            <a:pPr eaLnBrk="0" algn="l" indent="0" marL="0">
               <a:buNone/>
             </a:pPr>
             <a:r>
@@ -7325,7 +7325,7 @@
           <a:bodyPr wrap="square" lIns="0" tIns="0" rIns="0" bIns="0" rtlCol="0" anchor="ctr"/>
           <a:lstStyle/>
           <a:p>
-            <a:pPr indent="0" marL="0">
+            <a:pPr eaLnBrk="0" indent="0" marL="0">
               <a:spcAft>
                 <a:spcPts val="600"/>
               </a:spcAft>
@@ -7623,7 +7623,7 @@
       </p:sp>
       <p:sp>
         <p:nvSpPr>
-          <p:cNvPr id="16" name="S14-figure367" descr="십 칸 틀에 1개"/>
+          <p:cNvPr id="16" name="S14-figure367" descr="1개의 십 칸 틀 중 1번째: 모두 1개"/>
           <p:cNvSpPr/>
           <p:nvPr/>
         </p:nvSpPr>
@@ -7669,7 +7669,7 @@
           <a:bodyPr wrap="square" lIns="0" tIns="0" rIns="0" bIns="0" rtlCol="0" anchor="ctr"/>
           <a:lstStyle/>
           <a:p>
-            <a:pPr algn="ctr" indent="0" marL="0">
+            <a:pPr eaLnBrk="0" algn="ctr" indent="0" marL="0">
               <a:buNone/>
             </a:pPr>
             <a:r>
@@ -7989,7 +7989,7 @@
       </p:sp>
       <p:sp>
         <p:nvSpPr>
-          <p:cNvPr id="30" name="S14-figure381" descr="십 칸 틀에 2개"/>
+          <p:cNvPr id="30" name="S14-figure381" descr="1개의 십 칸 틀 중 1번째: 모두 2개"/>
           <p:cNvSpPr/>
           <p:nvPr/>
         </p:nvSpPr>
@@ -8035,7 +8035,7 @@
           <a:bodyPr wrap="square" lIns="0" tIns="0" rIns="0" bIns="0" rtlCol="0" anchor="ctr"/>
           <a:lstStyle/>
           <a:p>
-            <a:pPr algn="ctr" indent="0" marL="0">
+            <a:pPr eaLnBrk="0" algn="ctr" indent="0" marL="0">
               <a:buNone/>
             </a:pPr>
             <a:r>
@@ -8380,7 +8380,7 @@
       </p:sp>
       <p:sp>
         <p:nvSpPr>
-          <p:cNvPr id="45" name="S14-figure396" descr="십 칸 틀에 3개"/>
+          <p:cNvPr id="45" name="S14-figure396" descr="1개의 십 칸 틀 중 1번째: 모두 3개"/>
           <p:cNvSpPr/>
           <p:nvPr/>
         </p:nvSpPr>
@@ -8426,7 +8426,7 @@
           <a:bodyPr wrap="square" lIns="0" tIns="0" rIns="0" bIns="0" rtlCol="0" anchor="ctr"/>
           <a:lstStyle/>
           <a:p>
-            <a:pPr algn="ctr" indent="0" marL="0">
+            <a:pPr eaLnBrk="0" algn="ctr" indent="0" marL="0">
               <a:buNone/>
             </a:pPr>
             <a:r>
@@ -8796,7 +8796,7 @@
       </p:sp>
       <p:sp>
         <p:nvSpPr>
-          <p:cNvPr id="61" name="S14-figure412" descr="십 칸 틀에 4개"/>
+          <p:cNvPr id="61" name="S14-figure412" descr="1개의 십 칸 틀 중 1번째: 모두 4개"/>
           <p:cNvSpPr/>
           <p:nvPr/>
         </p:nvSpPr>
@@ -8842,7 +8842,7 @@
           <a:bodyPr wrap="square" lIns="0" tIns="0" rIns="0" bIns="0" rtlCol="0" anchor="ctr"/>
           <a:lstStyle/>
           <a:p>
-            <a:pPr algn="ctr" indent="0" marL="0">
+            <a:pPr eaLnBrk="0" algn="ctr" indent="0" marL="0">
               <a:buNone/>
             </a:pPr>
             <a:r>
@@ -9237,7 +9237,7 @@
       </p:sp>
       <p:sp>
         <p:nvSpPr>
-          <p:cNvPr id="78" name="S14-figure429" descr="십 칸 틀에 5개"/>
+          <p:cNvPr id="78" name="S14-figure429" descr="1개의 십 칸 틀 중 1번째: 모두 5개"/>
           <p:cNvSpPr/>
           <p:nvPr/>
         </p:nvSpPr>
@@ -9283,7 +9283,7 @@
           <a:bodyPr wrap="square" lIns="0" tIns="0" rIns="0" bIns="0" rtlCol="0" anchor="ctr"/>
           <a:lstStyle/>
           <a:p>
-            <a:pPr algn="ctr" indent="0" marL="0">
+            <a:pPr eaLnBrk="0" algn="ctr" indent="0" marL="0">
               <a:buNone/>
             </a:pPr>
             <a:r>
@@ -9340,7 +9340,7 @@
             </a:lvl1pPr>
           </a:lstStyle>
           <a:p>
-            <a:pPr algn="r"/>
+            <a:pPr eaLnBrk="0" algn="r"/>
             <a:fld id="{F7021451-1387-4CA6-816F-3879F97B5CBC}" type="slidenum">
               <a:rPr b="0" lang="en-US"/>
               <a:t>14</a:t>
@@ -9397,7 +9397,7 @@
           <a:bodyPr wrap="square" lIns="0" tIns="0" rIns="0" bIns="0" rtlCol="0" anchor="ctr"/>
           <a:lstStyle/>
           <a:p>
-            <a:pPr algn="l" indent="0" marL="0">
+            <a:pPr eaLnBrk="0" algn="l" indent="0" marL="0">
               <a:buNone/>
             </a:pPr>
             <a:r>
@@ -9436,7 +9436,7 @@
           <a:bodyPr wrap="square" lIns="0" tIns="0" rIns="0" bIns="0" rtlCol="0" anchor="ctr"/>
           <a:lstStyle/>
           <a:p>
-            <a:pPr algn="l" indent="0" marL="0">
+            <a:pPr eaLnBrk="0" algn="l" indent="0" marL="0">
               <a:buNone/>
             </a:pPr>
             <a:r>
@@ -9483,7 +9483,7 @@
           <a:bodyPr wrap="square" lIns="0" tIns="0" rIns="0" bIns="0" rtlCol="0" anchor="ctr"/>
           <a:lstStyle/>
           <a:p>
-            <a:pPr algn="ctr" indent="0" marL="0">
+            <a:pPr eaLnBrk="0" algn="ctr" indent="0" marL="0">
               <a:buNone/>
             </a:pPr>
             <a:r>
@@ -9928,7 +9928,7 @@
       </p:sp>
       <p:sp>
         <p:nvSpPr>
-          <p:cNvPr id="22" name="S02-figure52" descr="십 칸 틀에 7개"/>
+          <p:cNvPr id="22" name="S02-figure52" descr="1개의 십 칸 틀 중 1번째: 모두 7개"/>
           <p:cNvSpPr/>
           <p:nvPr/>
         </p:nvSpPr>
@@ -9982,7 +9982,7 @@
           <a:bodyPr wrap="square" lIns="0" tIns="0" rIns="0" bIns="0" rtlCol="0" anchor="ctr"/>
           <a:lstStyle/>
           <a:p>
-            <a:pPr algn="ctr" indent="0" marL="0">
+            <a:pPr eaLnBrk="0" algn="ctr" indent="0" marL="0">
               <a:buNone/>
             </a:pPr>
             <a:r>
@@ -10158,7 +10158,7 @@
           <a:bodyPr wrap="square" lIns="0" tIns="0" rIns="0" bIns="0" rtlCol="0" anchor="ctr"/>
           <a:lstStyle/>
           <a:p>
-            <a:pPr algn="ctr" indent="0" marL="0">
+            <a:pPr eaLnBrk="0" algn="ctr" indent="0" marL="0">
               <a:buNone/>
             </a:pPr>
             <a:r>
@@ -10197,7 +10197,7 @@
           <a:bodyPr wrap="square" lIns="0" tIns="0" rIns="0" bIns="0" rtlCol="0" anchor="ctr"/>
           <a:lstStyle/>
           <a:p>
-            <a:pPr algn="l" indent="0" marL="0">
+            <a:pPr eaLnBrk="0" algn="l" indent="0" marL="0">
               <a:buNone/>
             </a:pPr>
             <a:r>
@@ -10254,7 +10254,7 @@
             </a:lvl1pPr>
           </a:lstStyle>
           <a:p>
-            <a:pPr algn="r"/>
+            <a:pPr eaLnBrk="0" algn="r"/>
             <a:fld id="{F7021451-1387-4CA6-816F-3879F97B5CBC}" type="slidenum">
               <a:rPr b="0" lang="en-US"/>
               <a:t>2</a:t>
@@ -10311,7 +10311,7 @@
           <a:bodyPr wrap="square" lIns="0" tIns="0" rIns="0" bIns="0" rtlCol="0" anchor="ctr"/>
           <a:lstStyle/>
           <a:p>
-            <a:pPr algn="l" indent="0" marL="0">
+            <a:pPr eaLnBrk="0" algn="l" indent="0" marL="0">
               <a:buNone/>
             </a:pPr>
             <a:r>
@@ -10377,7 +10377,7 @@
           <a:bodyPr wrap="square" lIns="0" tIns="0" rIns="0" bIns="0" rtlCol="0" anchor="ctr"/>
           <a:lstStyle/>
           <a:p>
-            <a:pPr indent="0" marL="0">
+            <a:pPr eaLnBrk="0" indent="0" marL="0">
               <a:spcAft>
                 <a:spcPts val="600"/>
               </a:spcAft>
@@ -10446,7 +10446,7 @@
           <a:bodyPr wrap="square" lIns="0" tIns="0" rIns="0" bIns="0" rtlCol="0" anchor="ctr"/>
           <a:lstStyle/>
           <a:p>
-            <a:pPr indent="0" marL="0">
+            <a:pPr eaLnBrk="0" indent="0" marL="0">
               <a:spcAft>
                 <a:spcPts val="600"/>
               </a:spcAft>
@@ -10515,7 +10515,7 @@
           <a:bodyPr wrap="square" lIns="0" tIns="0" rIns="0" bIns="0" rtlCol="0" anchor="ctr"/>
           <a:lstStyle/>
           <a:p>
-            <a:pPr indent="0" marL="0">
+            <a:pPr eaLnBrk="0" indent="0" marL="0">
               <a:spcAft>
                 <a:spcPts val="600"/>
               </a:spcAft>
@@ -10605,7 +10605,7 @@
           <a:bodyPr wrap="square" lIns="0" tIns="0" rIns="0" bIns="0" rtlCol="0" anchor="ctr"/>
           <a:lstStyle/>
           <a:p>
-            <a:pPr algn="ctr" indent="0" marL="0">
+            <a:pPr eaLnBrk="0" algn="ctr" indent="0" marL="0">
               <a:buNone/>
             </a:pPr>
             <a:r>
@@ -10667,7 +10667,7 @@
           <a:bodyPr wrap="square" lIns="0" tIns="0" rIns="0" bIns="0" rtlCol="0" anchor="ctr"/>
           <a:lstStyle/>
           <a:p>
-            <a:pPr algn="ctr" indent="0" marL="0">
+            <a:pPr eaLnBrk="0" algn="ctr" indent="0" marL="0">
               <a:buNone/>
             </a:pPr>
             <a:r>
@@ -10729,7 +10729,7 @@
           <a:bodyPr wrap="square" lIns="0" tIns="0" rIns="0" bIns="0" rtlCol="0" anchor="ctr"/>
           <a:lstStyle/>
           <a:p>
-            <a:pPr algn="ctr" indent="0" marL="0">
+            <a:pPr eaLnBrk="0" algn="ctr" indent="0" marL="0">
               <a:buNone/>
             </a:pPr>
             <a:r>
@@ -10791,7 +10791,7 @@
           <a:bodyPr wrap="square" lIns="0" tIns="0" rIns="0" bIns="0" rtlCol="0" anchor="ctr"/>
           <a:lstStyle/>
           <a:p>
-            <a:pPr algn="ctr" indent="0" marL="0">
+            <a:pPr eaLnBrk="0" algn="ctr" indent="0" marL="0">
               <a:buNone/>
             </a:pPr>
             <a:r>
@@ -10853,7 +10853,7 @@
           <a:bodyPr wrap="square" lIns="0" tIns="0" rIns="0" bIns="0" rtlCol="0" anchor="ctr"/>
           <a:lstStyle/>
           <a:p>
-            <a:pPr algn="ctr" indent="0" marL="0">
+            <a:pPr eaLnBrk="0" algn="ctr" indent="0" marL="0">
               <a:buNone/>
             </a:pPr>
             <a:r>
@@ -10915,7 +10915,7 @@
           <a:bodyPr wrap="square" lIns="0" tIns="0" rIns="0" bIns="0" rtlCol="0" anchor="ctr"/>
           <a:lstStyle/>
           <a:p>
-            <a:pPr algn="ctr" indent="0" marL="0">
+            <a:pPr eaLnBrk="0" algn="ctr" indent="0" marL="0">
               <a:buNone/>
             </a:pPr>
             <a:r>
@@ -10977,7 +10977,7 @@
           <a:bodyPr wrap="square" lIns="0" tIns="0" rIns="0" bIns="0" rtlCol="0" anchor="ctr"/>
           <a:lstStyle/>
           <a:p>
-            <a:pPr algn="ctr" indent="0" marL="0">
+            <a:pPr eaLnBrk="0" algn="ctr" indent="0" marL="0">
               <a:buNone/>
             </a:pPr>
             <a:r>
@@ -11039,7 +11039,7 @@
           <a:bodyPr wrap="square" lIns="0" tIns="0" rIns="0" bIns="0" rtlCol="0" anchor="ctr"/>
           <a:lstStyle/>
           <a:p>
-            <a:pPr algn="ctr" indent="0" marL="0">
+            <a:pPr eaLnBrk="0" algn="ctr" indent="0" marL="0">
               <a:buNone/>
             </a:pPr>
             <a:r>
@@ -11101,7 +11101,7 @@
           <a:bodyPr wrap="square" lIns="0" tIns="0" rIns="0" bIns="0" rtlCol="0" anchor="ctr"/>
           <a:lstStyle/>
           <a:p>
-            <a:pPr algn="ctr" indent="0" marL="0">
+            <a:pPr eaLnBrk="0" algn="ctr" indent="0" marL="0">
               <a:buNone/>
             </a:pPr>
             <a:r>
@@ -11163,7 +11163,7 @@
           <a:bodyPr wrap="square" lIns="0" tIns="0" rIns="0" bIns="0" rtlCol="0" anchor="ctr"/>
           <a:lstStyle/>
           <a:p>
-            <a:pPr algn="ctr" indent="0" marL="0">
+            <a:pPr eaLnBrk="0" algn="ctr" indent="0" marL="0">
               <a:buNone/>
             </a:pPr>
             <a:r>
@@ -11249,7 +11249,7 @@
             </a:lvl1pPr>
           </a:lstStyle>
           <a:p>
-            <a:pPr algn="r"/>
+            <a:pPr eaLnBrk="0" algn="r"/>
             <a:fld id="{F7021451-1387-4CA6-816F-3879F97B5CBC}" type="slidenum">
               <a:rPr b="0" lang="en-US"/>
               <a:t>3</a:t>
@@ -11306,7 +11306,7 @@
           <a:bodyPr wrap="square" lIns="0" tIns="0" rIns="0" bIns="0" rtlCol="0" anchor="ctr"/>
           <a:lstStyle/>
           <a:p>
-            <a:pPr algn="l" indent="0" marL="0">
+            <a:pPr eaLnBrk="0" algn="l" indent="0" marL="0">
               <a:buNone/>
             </a:pPr>
             <a:r>
@@ -11345,7 +11345,7 @@
           <a:bodyPr wrap="square" lIns="0" tIns="0" rIns="0" bIns="0" rtlCol="0" anchor="ctr"/>
           <a:lstStyle/>
           <a:p>
-            <a:pPr algn="l" indent="0" marL="0">
+            <a:pPr eaLnBrk="0" algn="l" indent="0" marL="0">
               <a:buNone/>
             </a:pPr>
             <a:r>
@@ -11411,7 +11411,7 @@
           <a:bodyPr wrap="square" lIns="0" tIns="0" rIns="0" bIns="0" rtlCol="0" anchor="ctr"/>
           <a:lstStyle/>
           <a:p>
-            <a:pPr indent="0" marL="0">
+            <a:pPr eaLnBrk="0" indent="0" marL="0">
               <a:spcAft>
                 <a:spcPts val="600"/>
               </a:spcAft>
@@ -11784,7 +11784,7 @@
       </p:sp>
       <p:sp>
         <p:nvSpPr>
-          <p:cNvPr id="20" name="S04-figure106" descr="십 칸 틀에 4개"/>
+          <p:cNvPr id="20" name="S04-figure106" descr="1개의 십 칸 틀 중 1번째: 모두 4개"/>
           <p:cNvSpPr/>
           <p:nvPr/>
         </p:nvSpPr>
@@ -11830,7 +11830,7 @@
           <a:bodyPr wrap="square" lIns="0" tIns="0" rIns="0" bIns="0" rtlCol="0" anchor="ctr"/>
           <a:lstStyle/>
           <a:p>
-            <a:pPr algn="ctr" indent="0" marL="0">
+            <a:pPr eaLnBrk="0" algn="ctr" indent="0" marL="0">
               <a:buNone/>
             </a:pPr>
             <a:r>
@@ -12225,7 +12225,7 @@
       </p:sp>
       <p:sp>
         <p:nvSpPr>
-          <p:cNvPr id="37" name="S04-figure123" descr="십 칸 틀에 5개"/>
+          <p:cNvPr id="37" name="S04-figure123" descr="1개의 십 칸 틀 중 1번째: 모두 5개"/>
           <p:cNvSpPr/>
           <p:nvPr/>
         </p:nvSpPr>
@@ -12271,7 +12271,7 @@
           <a:bodyPr wrap="square" lIns="0" tIns="0" rIns="0" bIns="0" rtlCol="0" anchor="ctr"/>
           <a:lstStyle/>
           <a:p>
-            <a:pPr algn="ctr" indent="0" marL="0">
+            <a:pPr eaLnBrk="0" algn="ctr" indent="0" marL="0">
               <a:buNone/>
             </a:pPr>
             <a:r>
@@ -12328,7 +12328,7 @@
             </a:lvl1pPr>
           </a:lstStyle>
           <a:p>
-            <a:pPr algn="r"/>
+            <a:pPr eaLnBrk="0" algn="r"/>
             <a:fld id="{F7021451-1387-4CA6-816F-3879F97B5CBC}" type="slidenum">
               <a:rPr b="0" lang="en-US"/>
               <a:t>4</a:t>
@@ -12385,7 +12385,7 @@
           <a:bodyPr wrap="square" lIns="0" tIns="0" rIns="0" bIns="0" rtlCol="0" anchor="ctr"/>
           <a:lstStyle/>
           <a:p>
-            <a:pPr algn="l" indent="0" marL="0">
+            <a:pPr eaLnBrk="0" algn="l" indent="0" marL="0">
               <a:buNone/>
             </a:pPr>
             <a:r>
@@ -12424,7 +12424,7 @@
           <a:bodyPr wrap="square" lIns="0" tIns="0" rIns="0" bIns="0" rtlCol="0" anchor="ctr"/>
           <a:lstStyle/>
           <a:p>
-            <a:pPr algn="l" indent="0" marL="0">
+            <a:pPr eaLnBrk="0" algn="l" indent="0" marL="0">
               <a:buNone/>
             </a:pPr>
             <a:r>
@@ -12490,7 +12490,7 @@
           <a:bodyPr wrap="square" lIns="0" tIns="0" rIns="0" bIns="0" rtlCol="0" anchor="ctr"/>
           <a:lstStyle/>
           <a:p>
-            <a:pPr indent="0" marL="0">
+            <a:pPr eaLnBrk="0" indent="0" marL="0">
               <a:spcAft>
                 <a:spcPts val="600"/>
               </a:spcAft>
@@ -12863,7 +12863,7 @@
       </p:sp>
       <p:sp>
         <p:nvSpPr>
-          <p:cNvPr id="20" name="S05-figure142" descr="십 칸 틀에 4개"/>
+          <p:cNvPr id="20" name="S05-figure142" descr="1개의 십 칸 틀 중 1번째: 모두 4개"/>
           <p:cNvSpPr/>
           <p:nvPr/>
         </p:nvSpPr>
@@ -12909,7 +12909,7 @@
           <a:bodyPr wrap="square" lIns="0" tIns="0" rIns="0" bIns="0" rtlCol="0" anchor="ctr"/>
           <a:lstStyle/>
           <a:p>
-            <a:pPr algn="ctr" indent="0" marL="0">
+            <a:pPr eaLnBrk="0" algn="ctr" indent="0" marL="0">
               <a:buNone/>
             </a:pPr>
             <a:r>
@@ -13254,7 +13254,7 @@
       </p:sp>
       <p:sp>
         <p:nvSpPr>
-          <p:cNvPr id="35" name="S05-figure157" descr="십 칸 틀에 3개"/>
+          <p:cNvPr id="35" name="S05-figure157" descr="1개의 십 칸 틀 중 1번째: 모두 3개"/>
           <p:cNvSpPr/>
           <p:nvPr/>
         </p:nvSpPr>
@@ -13300,7 +13300,7 @@
           <a:bodyPr wrap="square" lIns="0" tIns="0" rIns="0" bIns="0" rtlCol="0" anchor="ctr"/>
           <a:lstStyle/>
           <a:p>
-            <a:pPr algn="ctr" indent="0" marL="0">
+            <a:pPr eaLnBrk="0" algn="ctr" indent="0" marL="0">
               <a:buNone/>
             </a:pPr>
             <a:r>
@@ -13357,7 +13357,7 @@
             </a:lvl1pPr>
           </a:lstStyle>
           <a:p>
-            <a:pPr algn="r"/>
+            <a:pPr eaLnBrk="0" algn="r"/>
             <a:fld id="{F7021451-1387-4CA6-816F-3879F97B5CBC}" type="slidenum">
               <a:rPr b="0" lang="en-US"/>
               <a:t>5</a:t>
@@ -13414,7 +13414,7 @@
           <a:bodyPr wrap="square" lIns="0" tIns="0" rIns="0" bIns="0" rtlCol="0" anchor="ctr"/>
           <a:lstStyle/>
           <a:p>
-            <a:pPr algn="l" indent="0" marL="0">
+            <a:pPr eaLnBrk="0" algn="l" indent="0" marL="0">
               <a:buNone/>
             </a:pPr>
             <a:r>
@@ -13453,7 +13453,7 @@
           <a:bodyPr wrap="square" lIns="0" tIns="0" rIns="0" bIns="0" rtlCol="0" anchor="ctr"/>
           <a:lstStyle/>
           <a:p>
-            <a:pPr algn="l" indent="0" marL="0">
+            <a:pPr eaLnBrk="0" algn="l" indent="0" marL="0">
               <a:buNone/>
             </a:pPr>
             <a:r>
@@ -13519,7 +13519,7 @@
           <a:bodyPr wrap="square" lIns="0" tIns="0" rIns="0" bIns="0" rtlCol="0" anchor="ctr"/>
           <a:lstStyle/>
           <a:p>
-            <a:pPr indent="0" marL="0">
+            <a:pPr eaLnBrk="0" indent="0" marL="0">
               <a:spcAft>
                 <a:spcPts val="600"/>
               </a:spcAft>
@@ -13588,7 +13588,7 @@
           <a:bodyPr wrap="square" lIns="0" tIns="0" rIns="0" bIns="0" rtlCol="0" anchor="ctr"/>
           <a:lstStyle/>
           <a:p>
-            <a:pPr indent="0" marL="0">
+            <a:pPr eaLnBrk="0" indent="0" marL="0">
               <a:spcAft>
                 <a:spcPts val="600"/>
               </a:spcAft>
@@ -13657,7 +13657,7 @@
           <a:bodyPr wrap="square" lIns="0" tIns="0" rIns="0" bIns="0" rtlCol="0" anchor="ctr"/>
           <a:lstStyle/>
           <a:p>
-            <a:pPr indent="0" marL="0">
+            <a:pPr eaLnBrk="0" indent="0" marL="0">
               <a:spcAft>
                 <a:spcPts val="600"/>
               </a:spcAft>
@@ -14044,7 +14044,7 @@
             </a:lvl1pPr>
           </a:lstStyle>
           <a:p>
-            <a:pPr algn="r"/>
+            <a:pPr eaLnBrk="0" algn="r"/>
             <a:fld id="{F7021451-1387-4CA6-816F-3879F97B5CBC}" type="slidenum">
               <a:rPr b="0" lang="en-US"/>
               <a:t>6</a:t>
@@ -14101,7 +14101,7 @@
           <a:bodyPr wrap="square" lIns="0" tIns="0" rIns="0" bIns="0" rtlCol="0" anchor="ctr"/>
           <a:lstStyle/>
           <a:p>
-            <a:pPr algn="l" indent="0" marL="0">
+            <a:pPr eaLnBrk="0" algn="l" indent="0" marL="0">
               <a:buNone/>
             </a:pPr>
             <a:r>
@@ -14140,7 +14140,7 @@
           <a:bodyPr wrap="square" lIns="0" tIns="0" rIns="0" bIns="0" rtlCol="0" anchor="ctr"/>
           <a:lstStyle/>
           <a:p>
-            <a:pPr algn="l" indent="0" marL="0">
+            <a:pPr eaLnBrk="0" algn="l" indent="0" marL="0">
               <a:buNone/>
             </a:pPr>
             <a:r>
@@ -14206,7 +14206,7 @@
           <a:bodyPr wrap="square" lIns="0" tIns="0" rIns="0" bIns="0" rtlCol="0" anchor="ctr"/>
           <a:lstStyle/>
           <a:p>
-            <a:pPr indent="0" marL="0">
+            <a:pPr eaLnBrk="0" indent="0" marL="0">
               <a:spcAft>
                 <a:spcPts val="600"/>
               </a:spcAft>
@@ -14256,7 +14256,7 @@
           <a:bodyPr wrap="square" lIns="0" tIns="0" rIns="0" bIns="0" rtlCol="0" anchor="ctr"/>
           <a:lstStyle/>
           <a:p>
-            <a:pPr algn="ctr" indent="0" marL="0">
+            <a:pPr eaLnBrk="0" algn="ctr" indent="0" marL="0">
               <a:buNone/>
             </a:pPr>
             <a:r>
@@ -14295,7 +14295,7 @@
           <a:bodyPr wrap="square" lIns="0" tIns="0" rIns="0" bIns="0" rtlCol="0" anchor="ctr"/>
           <a:lstStyle/>
           <a:p>
-            <a:pPr algn="l" indent="0" marL="0">
+            <a:pPr eaLnBrk="0" algn="l" indent="0" marL="0">
               <a:buNone/>
             </a:pPr>
             <a:r>
@@ -14342,7 +14342,7 @@
           <a:bodyPr wrap="square" lIns="0" tIns="0" rIns="0" bIns="0" rtlCol="0" anchor="ctr"/>
           <a:lstStyle/>
           <a:p>
-            <a:pPr algn="ctr" indent="0" marL="0">
+            <a:pPr eaLnBrk="0" algn="ctr" indent="0" marL="0">
               <a:buNone/>
             </a:pPr>
             <a:r>
@@ -14381,7 +14381,7 @@
           <a:bodyPr wrap="square" lIns="0" tIns="0" rIns="0" bIns="0" rtlCol="0" anchor="ctr"/>
           <a:lstStyle/>
           <a:p>
-            <a:pPr algn="l" indent="0" marL="0">
+            <a:pPr eaLnBrk="0" algn="l" indent="0" marL="0">
               <a:buNone/>
             </a:pPr>
             <a:r>
@@ -14428,7 +14428,7 @@
           <a:bodyPr wrap="square" lIns="0" tIns="0" rIns="0" bIns="0" rtlCol="0" anchor="ctr"/>
           <a:lstStyle/>
           <a:p>
-            <a:pPr algn="ctr" indent="0" marL="0">
+            <a:pPr eaLnBrk="0" algn="ctr" indent="0" marL="0">
               <a:buNone/>
             </a:pPr>
             <a:r>
@@ -14467,7 +14467,7 @@
           <a:bodyPr wrap="square" lIns="0" tIns="0" rIns="0" bIns="0" rtlCol="0" anchor="ctr"/>
           <a:lstStyle/>
           <a:p>
-            <a:pPr algn="l" indent="0" marL="0">
+            <a:pPr eaLnBrk="0" algn="l" indent="0" marL="0">
               <a:buNone/>
             </a:pPr>
             <a:r>
@@ -14514,7 +14514,7 @@
           <a:bodyPr wrap="square" lIns="0" tIns="0" rIns="0" bIns="0" rtlCol="0" anchor="ctr"/>
           <a:lstStyle/>
           <a:p>
-            <a:pPr algn="ctr" indent="0" marL="0">
+            <a:pPr eaLnBrk="0" algn="ctr" indent="0" marL="0">
               <a:buNone/>
             </a:pPr>
             <a:r>
@@ -14553,7 +14553,7 @@
           <a:bodyPr wrap="square" lIns="0" tIns="0" rIns="0" bIns="0" rtlCol="0" anchor="ctr"/>
           <a:lstStyle/>
           <a:p>
-            <a:pPr algn="l" indent="0" marL="0">
+            <a:pPr eaLnBrk="0" algn="l" indent="0" marL="0">
               <a:buNone/>
             </a:pPr>
             <a:r>
@@ -14610,7 +14610,7 @@
             </a:lvl1pPr>
           </a:lstStyle>
           <a:p>
-            <a:pPr algn="r"/>
+            <a:pPr eaLnBrk="0" algn="r"/>
             <a:fld id="{F7021451-1387-4CA6-816F-3879F97B5CBC}" type="slidenum">
               <a:rPr b="0" lang="en-US"/>
               <a:t>7</a:t>
@@ -14667,7 +14667,7 @@
           <a:bodyPr wrap="square" lIns="0" tIns="0" rIns="0" bIns="0" rtlCol="0" anchor="ctr"/>
           <a:lstStyle/>
           <a:p>
-            <a:pPr algn="l" indent="0" marL="0">
+            <a:pPr eaLnBrk="0" algn="l" indent="0" marL="0">
               <a:buNone/>
             </a:pPr>
             <a:r>
@@ -14733,7 +14733,7 @@
           <a:bodyPr wrap="square" lIns="0" tIns="0" rIns="0" bIns="0" rtlCol="0" anchor="ctr"/>
           <a:lstStyle/>
           <a:p>
-            <a:pPr indent="0" marL="0">
+            <a:pPr eaLnBrk="0" indent="0" marL="0">
               <a:spcAft>
                 <a:spcPts val="600"/>
               </a:spcAft>
@@ -14802,7 +14802,7 @@
           <a:bodyPr wrap="square" lIns="0" tIns="0" rIns="0" bIns="0" rtlCol="0" anchor="ctr"/>
           <a:lstStyle/>
           <a:p>
-            <a:pPr indent="0" marL="0">
+            <a:pPr eaLnBrk="0" indent="0" marL="0">
               <a:spcAft>
                 <a:spcPts val="600"/>
               </a:spcAft>
@@ -14852,7 +14852,7 @@
           <a:bodyPr wrap="square" lIns="177800" tIns="0" rIns="177800" bIns="0" rtlCol="0" anchor="ctr"/>
           <a:lstStyle/>
           <a:p>
-            <a:pPr algn="l" indent="0" marL="0">
+            <a:pPr eaLnBrk="0" algn="l" indent="0" marL="0">
               <a:buNone/>
             </a:pPr>
             <a:r>
@@ -15222,7 +15222,7 @@
       </p:sp>
       <p:sp>
         <p:nvSpPr>
-          <p:cNvPr id="22" name="S08-figure209" descr="십 칸 틀에 4개"/>
+          <p:cNvPr id="22" name="S08-figure209" descr="1개의 십 칸 틀 중 1번째: 모두 4개"/>
           <p:cNvSpPr/>
           <p:nvPr/>
         </p:nvSpPr>
@@ -15268,7 +15268,7 @@
           <a:bodyPr wrap="square" lIns="0" tIns="0" rIns="0" bIns="0" rtlCol="0" anchor="t"/>
           <a:lstStyle/>
           <a:p>
-            <a:pPr algn="l" indent="0" marL="0">
+            <a:pPr eaLnBrk="0" algn="l" indent="0" marL="0">
               <a:buNone/>
             </a:pPr>
             <a:r>
@@ -15315,7 +15315,7 @@
           <a:bodyPr wrap="square" lIns="177800" tIns="0" rIns="177800" bIns="0" rtlCol="0" anchor="ctr"/>
           <a:lstStyle/>
           <a:p>
-            <a:pPr algn="l" indent="0" marL="0">
+            <a:pPr eaLnBrk="0" algn="l" indent="0" marL="0">
               <a:buNone/>
             </a:pPr>
             <a:r>
@@ -15735,7 +15735,7 @@
       </p:sp>
       <p:sp>
         <p:nvSpPr>
-          <p:cNvPr id="41" name="S08-figure228" descr="십 칸 틀에 6개"/>
+          <p:cNvPr id="41" name="S08-figure228" descr="1개의 십 칸 틀 중 1번째: 모두 6개"/>
           <p:cNvSpPr/>
           <p:nvPr/>
         </p:nvSpPr>
@@ -15781,7 +15781,7 @@
           <a:bodyPr wrap="square" lIns="0" tIns="0" rIns="0" bIns="0" rtlCol="0" anchor="t"/>
           <a:lstStyle/>
           <a:p>
-            <a:pPr algn="l" indent="0" marL="0">
+            <a:pPr eaLnBrk="0" algn="l" indent="0" marL="0">
               <a:buNone/>
             </a:pPr>
             <a:r>
@@ -15838,7 +15838,7 @@
             </a:lvl1pPr>
           </a:lstStyle>
           <a:p>
-            <a:pPr algn="r"/>
+            <a:pPr eaLnBrk="0" algn="r"/>
             <a:fld id="{F7021451-1387-4CA6-816F-3879F97B5CBC}" type="slidenum">
               <a:rPr b="0" lang="en-US"/>
               <a:t>8</a:t>
@@ -15895,7 +15895,7 @@
           <a:bodyPr wrap="square" lIns="0" tIns="0" rIns="0" bIns="0" rtlCol="0" anchor="ctr"/>
           <a:lstStyle/>
           <a:p>
-            <a:pPr algn="l" indent="0" marL="0">
+            <a:pPr eaLnBrk="0" algn="l" indent="0" marL="0">
               <a:buNone/>
             </a:pPr>
             <a:r>
@@ -15934,7 +15934,7 @@
           <a:bodyPr wrap="square" lIns="0" tIns="0" rIns="0" bIns="0" rtlCol="0" anchor="ctr"/>
           <a:lstStyle/>
           <a:p>
-            <a:pPr algn="l" indent="0" marL="0">
+            <a:pPr eaLnBrk="0" algn="l" indent="0" marL="0">
               <a:buNone/>
             </a:pPr>
             <a:r>
@@ -16000,7 +16000,7 @@
           <a:bodyPr wrap="square" lIns="0" tIns="0" rIns="0" bIns="0" rtlCol="0" anchor="ctr"/>
           <a:lstStyle/>
           <a:p>
-            <a:pPr indent="0" marL="0">
+            <a:pPr eaLnBrk="0" indent="0" marL="0">
               <a:spcAft>
                 <a:spcPts val="600"/>
               </a:spcAft>
@@ -16069,7 +16069,7 @@
           <a:bodyPr wrap="square" lIns="0" tIns="0" rIns="0" bIns="0" rtlCol="0" anchor="t"/>
           <a:lstStyle/>
           <a:p>
-            <a:pPr indent="0" marL="0">
+            <a:pPr eaLnBrk="0" indent="0" marL="0">
               <a:spcAft>
                 <a:spcPts val="600"/>
               </a:spcAft>
@@ -16159,7 +16159,7 @@
           <a:bodyPr wrap="square" lIns="0" tIns="0" rIns="0" bIns="0" rtlCol="0" anchor="ctr"/>
           <a:lstStyle/>
           <a:p>
-            <a:pPr algn="ctr" indent="0" marL="0">
+            <a:pPr eaLnBrk="0" algn="ctr" indent="0" marL="0">
               <a:buNone/>
             </a:pPr>
             <a:r>
@@ -16221,7 +16221,7 @@
           <a:bodyPr wrap="square" lIns="0" tIns="0" rIns="0" bIns="0" rtlCol="0" anchor="ctr"/>
           <a:lstStyle/>
           <a:p>
-            <a:pPr algn="ctr" indent="0" marL="0">
+            <a:pPr eaLnBrk="0" algn="ctr" indent="0" marL="0">
               <a:buNone/>
             </a:pPr>
             <a:r>
@@ -16283,7 +16283,7 @@
           <a:bodyPr wrap="square" lIns="0" tIns="0" rIns="0" bIns="0" rtlCol="0" anchor="ctr"/>
           <a:lstStyle/>
           <a:p>
-            <a:pPr algn="ctr" indent="0" marL="0">
+            <a:pPr eaLnBrk="0" algn="ctr" indent="0" marL="0">
               <a:buNone/>
             </a:pPr>
             <a:r>
@@ -16345,7 +16345,7 @@
           <a:bodyPr wrap="square" lIns="0" tIns="0" rIns="0" bIns="0" rtlCol="0" anchor="ctr"/>
           <a:lstStyle/>
           <a:p>
-            <a:pPr algn="ctr" indent="0" marL="0">
+            <a:pPr eaLnBrk="0" algn="ctr" indent="0" marL="0">
               <a:buNone/>
             </a:pPr>
             <a:r>
@@ -16407,7 +16407,7 @@
           <a:bodyPr wrap="square" lIns="0" tIns="0" rIns="0" bIns="0" rtlCol="0" anchor="ctr"/>
           <a:lstStyle/>
           <a:p>
-            <a:pPr algn="ctr" indent="0" marL="0">
+            <a:pPr eaLnBrk="0" algn="ctr" indent="0" marL="0">
               <a:buNone/>
             </a:pPr>
             <a:r>
@@ -16469,7 +16469,7 @@
           <a:bodyPr wrap="square" lIns="0" tIns="0" rIns="0" bIns="0" rtlCol="0" anchor="ctr"/>
           <a:lstStyle/>
           <a:p>
-            <a:pPr algn="ctr" indent="0" marL="0">
+            <a:pPr eaLnBrk="0" algn="ctr" indent="0" marL="0">
               <a:buNone/>
             </a:pPr>
             <a:r>
@@ -16531,7 +16531,7 @@
           <a:bodyPr wrap="square" lIns="0" tIns="0" rIns="0" bIns="0" rtlCol="0" anchor="ctr"/>
           <a:lstStyle/>
           <a:p>
-            <a:pPr algn="ctr" indent="0" marL="0">
+            <a:pPr eaLnBrk="0" algn="ctr" indent="0" marL="0">
               <a:buNone/>
             </a:pPr>
             <a:r>
@@ -16593,7 +16593,7 @@
           <a:bodyPr wrap="square" lIns="0" tIns="0" rIns="0" bIns="0" rtlCol="0" anchor="ctr"/>
           <a:lstStyle/>
           <a:p>
-            <a:pPr algn="ctr" indent="0" marL="0">
+            <a:pPr eaLnBrk="0" algn="ctr" indent="0" marL="0">
               <a:buNone/>
             </a:pPr>
             <a:r>
@@ -16655,7 +16655,7 @@
           <a:bodyPr wrap="square" lIns="0" tIns="0" rIns="0" bIns="0" rtlCol="0" anchor="ctr"/>
           <a:lstStyle/>
           <a:p>
-            <a:pPr algn="ctr" indent="0" marL="0">
+            <a:pPr eaLnBrk="0" algn="ctr" indent="0" marL="0">
               <a:buNone/>
             </a:pPr>
             <a:r>
@@ -16717,7 +16717,7 @@
           <a:bodyPr wrap="square" lIns="0" tIns="0" rIns="0" bIns="0" rtlCol="0" anchor="ctr"/>
           <a:lstStyle/>
           <a:p>
-            <a:pPr algn="ctr" indent="0" marL="0">
+            <a:pPr eaLnBrk="0" algn="ctr" indent="0" marL="0">
               <a:buNone/>
             </a:pPr>
             <a:r>
@@ -16793,7 +16793,7 @@
           <a:bodyPr wrap="square" lIns="0" tIns="0" rIns="0" bIns="0" rtlCol="0" anchor="ctr"/>
           <a:lstStyle/>
           <a:p>
-            <a:pPr algn="ctr" indent="0" marL="0">
+            <a:pPr eaLnBrk="0" algn="ctr" indent="0" marL="0">
               <a:buNone/>
             </a:pPr>
             <a:r>
@@ -16832,7 +16832,7 @@
           <a:bodyPr wrap="square" lIns="0" tIns="0" rIns="0" bIns="0" rtlCol="0" anchor="ctr"/>
           <a:lstStyle/>
           <a:p>
-            <a:pPr algn="l" indent="0" marL="0">
+            <a:pPr eaLnBrk="0" algn="l" indent="0" marL="0">
               <a:buNone/>
             </a:pPr>
             <a:r>
@@ -16879,7 +16879,7 @@
           <a:bodyPr wrap="square" lIns="0" tIns="0" rIns="0" bIns="0" rtlCol="0" anchor="ctr"/>
           <a:lstStyle/>
           <a:p>
-            <a:pPr algn="ctr" indent="0" marL="0">
+            <a:pPr eaLnBrk="0" algn="ctr" indent="0" marL="0">
               <a:buNone/>
             </a:pPr>
             <a:r>
@@ -16918,7 +16918,7 @@
           <a:bodyPr wrap="square" lIns="0" tIns="0" rIns="0" bIns="0" rtlCol="0" anchor="ctr"/>
           <a:lstStyle/>
           <a:p>
-            <a:pPr algn="l" indent="0" marL="0">
+            <a:pPr eaLnBrk="0" algn="l" indent="0" marL="0">
               <a:buNone/>
             </a:pPr>
             <a:r>
@@ -16965,7 +16965,7 @@
           <a:bodyPr wrap="square" lIns="0" tIns="0" rIns="0" bIns="0" rtlCol="0" anchor="ctr"/>
           <a:lstStyle/>
           <a:p>
-            <a:pPr algn="ctr" indent="0" marL="0">
+            <a:pPr eaLnBrk="0" algn="ctr" indent="0" marL="0">
               <a:buNone/>
             </a:pPr>
             <a:r>
@@ -17004,7 +17004,7 @@
           <a:bodyPr wrap="square" lIns="0" tIns="0" rIns="0" bIns="0" rtlCol="0" anchor="ctr"/>
           <a:lstStyle/>
           <a:p>
-            <a:pPr algn="l" indent="0" marL="0">
+            <a:pPr eaLnBrk="0" algn="l" indent="0" marL="0">
               <a:buNone/>
             </a:pPr>
             <a:r>
@@ -17061,7 +17061,7 @@
             </a:lvl1pPr>
           </a:lstStyle>
           <a:p>
-            <a:pPr algn="r"/>
+            <a:pPr eaLnBrk="0" algn="r"/>
             <a:fld id="{F7021451-1387-4CA6-816F-3879F97B5CBC}" type="slidenum">
               <a:rPr b="0" lang="en-US"/>
               <a:t>9</a:t>

--- a/dist/초1/수학/수와연산/초1_수학_수와연산_02_수의순서와크기비교.pptx
+++ b/dist/초1/수학/수와연산/초1_수학_수와연산_02_수의순서와크기비교.pptx
@@ -120,13 +120,13 @@
   <p:extLst>
     <p:ext uri="{521415D9-36F7-43E2-AB2F-B90AF26B5E84}">
       <p14:sectionLst xmlns:p14="http://schemas.microsoft.com/office/powerpoint/2010/main">
-        <p14:section name="도입" id="{4cef6669-9a41-c37e-bd16-410a25bfb36e}">
+        <p14:section name="도입" id="{99c85ec1-2603-a1e1-4963-b9372c213045}">
           <p14:sldIdLst>
             <p14:sldId id="256"/>
             <p14:sldId id="257"/>
           </p14:sldIdLst>
         </p14:section>
-        <p14:section name="개념" id="{7f50d5fe-ef8b-0522-d7fa-675d346ab75e}">
+        <p14:section name="개념" id="{fefecd04-2288-62e5-dff1-14f49e651fc3}">
           <p14:sldIdLst>
             <p14:sldId id="258"/>
             <p14:sldId id="259"/>
@@ -134,26 +134,26 @@
             <p14:sldId id="261"/>
           </p14:sldIdLst>
         </p14:section>
-        <p14:section name="연습" id="{f8cc9475-f1ff-0f63-7dec-cba95de340f7}">
+        <p14:section name="연습" id="{188a44e4-d6a8-9801-dd6c-60dd88447e04}">
           <p14:sldIdLst>
             <p14:sldId id="262"/>
             <p14:sldId id="263"/>
             <p14:sldId id="264"/>
           </p14:sldIdLst>
         </p14:section>
-        <p14:section name="확인" id="{429df250-6e18-a788-4888-3d8a40e23e1a}">
+        <p14:section name="확인" id="{6429dd28-6970-4d2e-d21b-d2ca7b99c8bf}">
           <p14:sldIdLst>
             <p14:sldId id="265"/>
             <p14:sldId id="266"/>
             <p14:sldId id="267"/>
           </p14:sldIdLst>
         </p14:section>
-        <p14:section name="정리" id="{1298aa14-0344-3fde-917f-b5f21145ec6c}">
+        <p14:section name="정리" id="{daeb1c57-6389-5d36-aceb-0665fa7e07f1}">
           <p14:sldIdLst>
             <p14:sldId id="268"/>
           </p14:sldIdLst>
         </p14:section>
-        <p14:section name="보충" id="{e32ab7ab-a8bd-ee5d-92ed-51c06cf90d8e}">
+        <p14:section name="보충" id="{b046066a-74a6-7d58-1ff6-1806e11ce42b}">
           <p14:sldIdLst>
             <p14:sldId id="269"/>
           </p14:sldIdLst>
@@ -9509,56 +9509,6 @@
         </p:nvSpPr>
         <p:spPr>
           <a:xfrm>
-            <a:off x="1847088" y="2011680"/>
-            <a:ext cx="640080" cy="640080"/>
-          </a:xfrm>
-          <a:prstGeom prst="rect">
-            <a:avLst/>
-          </a:prstGeom>
-          <a:solidFill>
-            <a:srgbClr val="FFFFFF"/>
-          </a:solidFill>
-          <a:ln w="19050">
-            <a:solidFill>
-              <a:srgbClr val="1F2937"/>
-            </a:solidFill>
-            <a:prstDash val="solid"/>
-          </a:ln>
-        </p:spPr>
-      </p:sp>
-      <p:sp>
-        <p:nvSpPr>
-          <p:cNvPr id="6" name="S02-dot36"/>
-          <p:cNvSpPr/>
-          <p:nvPr/>
-        </p:nvSpPr>
-        <p:spPr>
-          <a:xfrm>
-            <a:off x="1955902" y="2120494"/>
-            <a:ext cx="422453" cy="422453"/>
-          </a:xfrm>
-          <a:prstGeom prst="ellipse">
-            <a:avLst/>
-          </a:prstGeom>
-          <a:solidFill>
-            <a:srgbClr val="E9762B"/>
-          </a:solidFill>
-          <a:ln w="12700">
-            <a:solidFill>
-              <a:srgbClr val="1F2937"/>
-            </a:solidFill>
-            <a:prstDash val="solid"/>
-          </a:ln>
-        </p:spPr>
-      </p:sp>
-      <p:sp>
-        <p:nvSpPr>
-          <p:cNvPr id="7" name="S02-cell37"/>
-          <p:cNvSpPr/>
-          <p:nvPr/>
-        </p:nvSpPr>
-        <p:spPr>
-          <a:xfrm>
             <a:off x="2487168" y="2011680"/>
             <a:ext cx="640080" cy="640080"/>
           </a:xfrm>
@@ -9578,7 +9528,7 @@
       </p:sp>
       <p:sp>
         <p:nvSpPr>
-          <p:cNvPr id="8" name="S02-dot38"/>
+          <p:cNvPr id="6" name="S02-dot36"/>
           <p:cNvSpPr/>
           <p:nvPr/>
         </p:nvSpPr>
@@ -9603,7 +9553,7 @@
       </p:sp>
       <p:sp>
         <p:nvSpPr>
-          <p:cNvPr id="9" name="S02-cell39"/>
+          <p:cNvPr id="7" name="S02-cell37"/>
           <p:cNvSpPr/>
           <p:nvPr/>
         </p:nvSpPr>
@@ -9628,7 +9578,7 @@
       </p:sp>
       <p:sp>
         <p:nvSpPr>
-          <p:cNvPr id="10" name="S02-dot40"/>
+          <p:cNvPr id="8" name="S02-dot38"/>
           <p:cNvSpPr/>
           <p:nvPr/>
         </p:nvSpPr>
@@ -9653,7 +9603,7 @@
       </p:sp>
       <p:sp>
         <p:nvSpPr>
-          <p:cNvPr id="11" name="S02-cell41"/>
+          <p:cNvPr id="9" name="S02-cell39"/>
           <p:cNvSpPr/>
           <p:nvPr/>
         </p:nvSpPr>
@@ -9678,7 +9628,7 @@
       </p:sp>
       <p:sp>
         <p:nvSpPr>
-          <p:cNvPr id="12" name="S02-dot42"/>
+          <p:cNvPr id="10" name="S02-dot40"/>
           <p:cNvSpPr/>
           <p:nvPr/>
         </p:nvSpPr>
@@ -9703,7 +9653,7 @@
       </p:sp>
       <p:sp>
         <p:nvSpPr>
-          <p:cNvPr id="13" name="S02-cell43"/>
+          <p:cNvPr id="11" name="S02-cell41"/>
           <p:cNvSpPr/>
           <p:nvPr/>
         </p:nvSpPr>
@@ -9728,7 +9678,7 @@
       </p:sp>
       <p:sp>
         <p:nvSpPr>
-          <p:cNvPr id="14" name="S02-dot44"/>
+          <p:cNvPr id="12" name="S02-dot42"/>
           <p:cNvSpPr/>
           <p:nvPr/>
         </p:nvSpPr>
@@ -9753,57 +9703,57 @@
       </p:sp>
       <p:sp>
         <p:nvSpPr>
+          <p:cNvPr id="13" name="S02-cell43"/>
+          <p:cNvSpPr/>
+          <p:nvPr/>
+        </p:nvSpPr>
+        <p:spPr>
+          <a:xfrm>
+            <a:off x="5047488" y="2011680"/>
+            <a:ext cx="640080" cy="640080"/>
+          </a:xfrm>
+          <a:prstGeom prst="rect">
+            <a:avLst/>
+          </a:prstGeom>
+          <a:solidFill>
+            <a:srgbClr val="FFFFFF"/>
+          </a:solidFill>
+          <a:ln w="19050">
+            <a:solidFill>
+              <a:srgbClr val="1F2937"/>
+            </a:solidFill>
+            <a:prstDash val="solid"/>
+          </a:ln>
+        </p:spPr>
+      </p:sp>
+      <p:sp>
+        <p:nvSpPr>
+          <p:cNvPr id="14" name="S02-dot44"/>
+          <p:cNvSpPr/>
+          <p:nvPr/>
+        </p:nvSpPr>
+        <p:spPr>
+          <a:xfrm>
+            <a:off x="5156302" y="2120494"/>
+            <a:ext cx="422453" cy="422453"/>
+          </a:xfrm>
+          <a:prstGeom prst="ellipse">
+            <a:avLst/>
+          </a:prstGeom>
+          <a:solidFill>
+            <a:srgbClr val="E9762B"/>
+          </a:solidFill>
+          <a:ln w="12700">
+            <a:solidFill>
+              <a:srgbClr val="1F2937"/>
+            </a:solidFill>
+            <a:prstDash val="solid"/>
+          </a:ln>
+        </p:spPr>
+      </p:sp>
+      <p:sp>
+        <p:nvSpPr>
           <p:cNvPr id="15" name="S02-cell45"/>
-          <p:cNvSpPr/>
-          <p:nvPr/>
-        </p:nvSpPr>
-        <p:spPr>
-          <a:xfrm>
-            <a:off x="1847088" y="2651760"/>
-            <a:ext cx="640080" cy="640080"/>
-          </a:xfrm>
-          <a:prstGeom prst="rect">
-            <a:avLst/>
-          </a:prstGeom>
-          <a:solidFill>
-            <a:srgbClr val="FFFFFF"/>
-          </a:solidFill>
-          <a:ln w="19050">
-            <a:solidFill>
-              <a:srgbClr val="1F2937"/>
-            </a:solidFill>
-            <a:prstDash val="solid"/>
-          </a:ln>
-        </p:spPr>
-      </p:sp>
-      <p:sp>
-        <p:nvSpPr>
-          <p:cNvPr id="16" name="S02-dot46"/>
-          <p:cNvSpPr/>
-          <p:nvPr/>
-        </p:nvSpPr>
-        <p:spPr>
-          <a:xfrm>
-            <a:off x="1955902" y="2760574"/>
-            <a:ext cx="422453" cy="422453"/>
-          </a:xfrm>
-          <a:prstGeom prst="ellipse">
-            <a:avLst/>
-          </a:prstGeom>
-          <a:solidFill>
-            <a:srgbClr val="E9762B"/>
-          </a:solidFill>
-          <a:ln w="12700">
-            <a:solidFill>
-              <a:srgbClr val="1F2937"/>
-            </a:solidFill>
-            <a:prstDash val="solid"/>
-          </a:ln>
-        </p:spPr>
-      </p:sp>
-      <p:sp>
-        <p:nvSpPr>
-          <p:cNvPr id="17" name="S02-cell47"/>
           <p:cNvSpPr/>
           <p:nvPr/>
         </p:nvSpPr>
@@ -9828,7 +9778,7 @@
       </p:sp>
       <p:sp>
         <p:nvSpPr>
-          <p:cNvPr id="18" name="S02-dot48"/>
+          <p:cNvPr id="16" name="S02-dot46"/>
           <p:cNvSpPr/>
           <p:nvPr/>
         </p:nvSpPr>
@@ -9853,7 +9803,7 @@
       </p:sp>
       <p:sp>
         <p:nvSpPr>
-          <p:cNvPr id="19" name="S02-cell49"/>
+          <p:cNvPr id="17" name="S02-cell47"/>
           <p:cNvSpPr/>
           <p:nvPr/>
         </p:nvSpPr>
@@ -9878,7 +9828,32 @@
       </p:sp>
       <p:sp>
         <p:nvSpPr>
-          <p:cNvPr id="20" name="S02-cell50"/>
+          <p:cNvPr id="18" name="S02-dot48"/>
+          <p:cNvSpPr/>
+          <p:nvPr/>
+        </p:nvSpPr>
+        <p:spPr>
+          <a:xfrm>
+            <a:off x="3236062" y="2760574"/>
+            <a:ext cx="422453" cy="422453"/>
+          </a:xfrm>
+          <a:prstGeom prst="ellipse">
+            <a:avLst/>
+          </a:prstGeom>
+          <a:solidFill>
+            <a:srgbClr val="E9762B"/>
+          </a:solidFill>
+          <a:ln w="12700">
+            <a:solidFill>
+              <a:srgbClr val="1F2937"/>
+            </a:solidFill>
+            <a:prstDash val="solid"/>
+          </a:ln>
+        </p:spPr>
+      </p:sp>
+      <p:sp>
+        <p:nvSpPr>
+          <p:cNvPr id="19" name="S02-cell49"/>
           <p:cNvSpPr/>
           <p:nvPr/>
         </p:nvSpPr>
@@ -9903,7 +9878,7 @@
       </p:sp>
       <p:sp>
         <p:nvSpPr>
-          <p:cNvPr id="21" name="S02-cell51"/>
+          <p:cNvPr id="20" name="S02-cell50"/>
           <p:cNvSpPr/>
           <p:nvPr/>
         </p:nvSpPr>
@@ -9928,13 +9903,38 @@
       </p:sp>
       <p:sp>
         <p:nvSpPr>
+          <p:cNvPr id="21" name="S02-cell51"/>
+          <p:cNvSpPr/>
+          <p:nvPr/>
+        </p:nvSpPr>
+        <p:spPr>
+          <a:xfrm>
+            <a:off x="5047488" y="2651760"/>
+            <a:ext cx="640080" cy="640080"/>
+          </a:xfrm>
+          <a:prstGeom prst="rect">
+            <a:avLst/>
+          </a:prstGeom>
+          <a:solidFill>
+            <a:srgbClr val="FFFFFF"/>
+          </a:solidFill>
+          <a:ln w="19050">
+            <a:solidFill>
+              <a:srgbClr val="1F2937"/>
+            </a:solidFill>
+            <a:prstDash val="solid"/>
+          </a:ln>
+        </p:spPr>
+      </p:sp>
+      <p:sp>
+        <p:nvSpPr>
           <p:cNvPr id="22" name="S02-figure52" descr="1개의 십 칸 틀 중 1번째: 모두 7개"/>
           <p:cNvSpPr/>
           <p:nvPr/>
         </p:nvSpPr>
         <p:spPr>
           <a:xfrm>
-            <a:off x="1847088" y="2011680"/>
+            <a:off x="2487168" y="2011680"/>
             <a:ext cx="3200400" cy="1280160"/>
           </a:xfrm>
           <a:prstGeom prst="rect">
@@ -10008,7 +10008,7 @@
         </p:nvSpPr>
         <p:spPr>
           <a:xfrm>
-            <a:off x="2205990" y="3902202"/>
+            <a:off x="2846070" y="3902202"/>
             <a:ext cx="425196" cy="425196"/>
           </a:xfrm>
           <a:prstGeom prst="ellipse">
@@ -10033,7 +10033,7 @@
         </p:nvSpPr>
         <p:spPr>
           <a:xfrm>
-            <a:off x="2891790" y="3902202"/>
+            <a:off x="3531870" y="3902202"/>
             <a:ext cx="425196" cy="425196"/>
           </a:xfrm>
           <a:prstGeom prst="ellipse">
@@ -10058,7 +10058,7 @@
         </p:nvSpPr>
         <p:spPr>
           <a:xfrm>
-            <a:off x="3577590" y="3902202"/>
+            <a:off x="4217670" y="3902202"/>
             <a:ext cx="425196" cy="425196"/>
           </a:xfrm>
           <a:prstGeom prst="ellipse">
@@ -10083,7 +10083,7 @@
         </p:nvSpPr>
         <p:spPr>
           <a:xfrm>
-            <a:off x="4263390" y="3902202"/>
+            <a:off x="4903470" y="3902202"/>
             <a:ext cx="425196" cy="425196"/>
           </a:xfrm>
           <a:prstGeom prst="ellipse">
@@ -10108,7 +10108,7 @@
         </p:nvSpPr>
         <p:spPr>
           <a:xfrm>
-            <a:off x="2075688" y="3771900"/>
+            <a:off x="2715768" y="3771900"/>
             <a:ext cx="2743200" cy="685800"/>
           </a:xfrm>
           <a:prstGeom prst="rect">

--- a/dist/초1/수학/수와연산/초1_수학_수와연산_02_수의순서와크기비교.pptx
+++ b/dist/초1/수학/수와연산/초1_수학_수와연산_02_수의순서와크기비교.pptx
@@ -120,13 +120,13 @@
   <p:extLst>
     <p:ext uri="{521415D9-36F7-43E2-AB2F-B90AF26B5E84}">
       <p14:sectionLst xmlns:p14="http://schemas.microsoft.com/office/powerpoint/2010/main">
-        <p14:section name="도입" id="{99c85ec1-2603-a1e1-4963-b9372c213045}">
+        <p14:section name="도입" id="{bd6bc0e7-1166-2746-b36d-b8e9a99dd0e6}">
           <p14:sldIdLst>
             <p14:sldId id="256"/>
             <p14:sldId id="257"/>
           </p14:sldIdLst>
         </p14:section>
-        <p14:section name="개념" id="{fefecd04-2288-62e5-dff1-14f49e651fc3}">
+        <p14:section name="개념" id="{a15d3023-0b19-2cd5-d1e9-1256999ff2d3}">
           <p14:sldIdLst>
             <p14:sldId id="258"/>
             <p14:sldId id="259"/>
@@ -134,26 +134,26 @@
             <p14:sldId id="261"/>
           </p14:sldIdLst>
         </p14:section>
-        <p14:section name="연습" id="{188a44e4-d6a8-9801-dd6c-60dd88447e04}">
+        <p14:section name="연습" id="{a8c4597f-d356-823a-0867-6ef93a7e4e5e}">
           <p14:sldIdLst>
             <p14:sldId id="262"/>
             <p14:sldId id="263"/>
             <p14:sldId id="264"/>
           </p14:sldIdLst>
         </p14:section>
-        <p14:section name="확인" id="{6429dd28-6970-4d2e-d21b-d2ca7b99c8bf}">
+        <p14:section name="확인" id="{7d940465-cf48-a59a-0a55-2b0ca7731858}">
           <p14:sldIdLst>
             <p14:sldId id="265"/>
             <p14:sldId id="266"/>
             <p14:sldId id="267"/>
           </p14:sldIdLst>
         </p14:section>
-        <p14:section name="정리" id="{daeb1c57-6389-5d36-aceb-0665fa7e07f1}">
+        <p14:section name="정리" id="{1ad526f5-8abc-03c7-6b8d-e1ab9aa1edc6}">
           <p14:sldIdLst>
             <p14:sldId id="268"/>
           </p14:sldIdLst>
         </p14:section>
-        <p14:section name="보충" id="{b046066a-74a6-7d58-1ff6-1806e11ce42b}">
+        <p14:section name="보충" id="{dfd41360-8058-9448-3f2f-10befed76550}">
           <p14:sldIdLst>
             <p14:sldId id="269"/>
           </p14:sldIdLst>
@@ -2965,7 +2965,7 @@
               <a:buNone/>
             </a:pPr>
             <a:r>
-              <a:rPr lang="ko-KR" altLang="en-US" sz="5000" b="1" dirty="0">
+              <a:rPr lang="ko-KR" altLang="en-US" sz="4800" b="1" dirty="0">
                 <a:solidFill>
                   <a:srgbClr val="FFFFFF"/>
                 </a:solidFill>
